--- a/docs/HealthSense_Apresentacao.pptx
+++ b/docs/HealthSense_Apresentacao.pptx
@@ -2966,8 +2966,8 @@
         </p:nvSpPr>
         <p:spPr>
           <a:xfrm>
-            <a:off x="731520" y="5394960"/>
-            <a:ext cx="10058400" cy="365760"/>
+            <a:off x="731520" y="5285232"/>
+            <a:ext cx="10698480" cy="320040"/>
           </a:xfrm>
           <a:prstGeom prst="rect">
             <a:avLst/>
@@ -2991,9 +2991,48 @@
                 <a:ea typeface="Segoe UI" pitchFamily="34" charset="-122"/>
                 <a:cs typeface="Segoe UI" pitchFamily="34" charset="-120"/>
               </a:rPr>
-              <a:t>Prof. Daniel Leal Souza  ·  Equipe: [integrantes]  ·  Turma: [CC5MA / CC5NA]</a:t>
+              <a:t>Prof. Daniel Leal Souza   ·   Turma: [CC5MA / CC5NA]</a:t>
             </a:r>
             <a:endParaRPr lang="en-US" sz="1300" dirty="0"/>
+          </a:p>
+        </p:txBody>
+      </p:sp>
+      <p:sp>
+        <p:nvSpPr>
+          <p:cNvPr id="12" name="Text 10"/>
+          <p:cNvSpPr/>
+          <p:nvPr/>
+        </p:nvSpPr>
+        <p:spPr>
+          <a:xfrm>
+            <a:off x="731520" y="5596128"/>
+            <a:ext cx="10698480" cy="320040"/>
+          </a:xfrm>
+          <a:prstGeom prst="rect">
+            <a:avLst/>
+          </a:prstGeom>
+          <a:noFill/>
+          <a:ln/>
+        </p:spPr>
+        <p:txBody>
+          <a:bodyPr wrap="square" rtlCol="0" anchor="ctr"/>
+          <a:lstStyle/>
+          <a:p>
+            <a:pPr indent="0" marL="0">
+              <a:buNone/>
+            </a:pPr>
+            <a:r>
+              <a:rPr lang="en-US" sz="1200" dirty="0">
+                <a:solidFill>
+                  <a:srgbClr val="8893A7"/>
+                </a:solidFill>
+                <a:latin typeface="Segoe UI" pitchFamily="34" charset="0"/>
+                <a:ea typeface="Segoe UI" pitchFamily="34" charset="-122"/>
+                <a:cs typeface="Segoe UI" pitchFamily="34" charset="-120"/>
+              </a:rPr>
+              <a:t>Equipe: João Felipe Soares · Pedro Lyra · Paulo Ricardo · Murilo Carneiro · Vithor dos Santos</a:t>
+            </a:r>
+            <a:endParaRPr lang="en-US" sz="1200" dirty="0"/>
           </a:p>
         </p:txBody>
       </p:sp>
